--- a/ppt/MLOps01-Intro.pptx
+++ b/ppt/MLOps01-Intro.pptx
@@ -453,6 +453,37 @@
   </p:cSld>
   <p:clrMap bg1="lt1" tx1="dk1" bg2="lt2" tx2="dk2" accent1="accent1" accent2="accent2" accent3="accent3" accent4="accent4" accent5="accent5" accent6="accent6" hlink="hlink" folHlink="folHlink"/>
 </p:handoutMaster>
+</file>
+
+<file path=ppt/ink/ink1.xml><?xml version="1.0" encoding="utf-8"?>
+<inkml:ink xmlns:inkml="http://www.w3.org/2003/InkML">
+  <inkml:definitions>
+    <inkml:context xml:id="ctx0">
+      <inkml:inkSource xml:id="inkSrc0">
+        <inkml:traceFormat>
+          <inkml:channel name="X" type="integer" min="-1366" max="1920" units="cm"/>
+          <inkml:channel name="Y" type="integer" max="1080" units="cm"/>
+          <inkml:channel name="T" type="integer" max="2.14748E9" units="dev"/>
+        </inkml:traceFormat>
+        <inkml:channelProperties>
+          <inkml:channelProperty channel="X" name="resolution" value="95.52325" units="1/cm"/>
+          <inkml:channelProperty channel="Y" name="resolution" value="55.95855" units="1/cm"/>
+          <inkml:channelProperty channel="T" name="resolution" value="1" units="1/dev"/>
+        </inkml:channelProperties>
+      </inkml:inkSource>
+      <inkml:timestamp xml:id="ts0" timeString="2025-09-22T09:01:25.819"/>
+    </inkml:context>
+    <inkml:brush xml:id="br0">
+      <inkml:brushProperty name="width" value="0.05292" units="cm"/>
+      <inkml:brushProperty name="height" value="0.05292" units="cm"/>
+      <inkml:brushProperty name="color" value="#FF0000"/>
+    </inkml:brush>
+  </inkml:definitions>
+  <inkml:trace contextRef="#ctx0" brushRef="#br0">19198 9376 0,'0'-99'47,"0"74"-31,-4043 0-1,8086 1 1,-4043-1-1,-25 25 17,-24-25-1,24 25 0,0-25-15,-24 25-1,-26 0 1,1 0 0,24 0 15,1 0-15,-26 0-1,50 0-15,-49-25 16,24 25-1,-24 0 1,-1 0 0,-24-49-1,25 49 1,-125-25 0,51 25-1,-51-75 1,50 75-1,75-24 17,-25 24-17,74 0 1,-124 0 78,50 0-79,-124 0 1,-199 0 0,199 0-16,-100 0 15,75 0 1,199 0-1,24 0 126,-124 49-125,-74 175-1,-25-26 1,74-49 0,100-50-1,24-49 1,0-1 15,50 1-15,-24-25-1,24 49 1,-50 50 0,25-74-16,25-1 15,-74 100 1,74 0-1,-75 0 1,51-25 0,24-25-1,0 50 1,0-50 0,24-49-1,51 49 16,-50-74-31,-25 0 16,0 49-16,24-49 16,51 148-1,-50-98 1,24-1 0,1 50-1,-1 0 1,75 25-1,-24-50 1,-1 1 0,-50-76-1,51 1 1,-51 0 0,1-25 15,-25 25-16,49-25 1,50 0 0,75 49-1,123-24 1,75 25 0,74 24-1,-124-74 1,-173 0-1,-99 0-15,-51 0 63,224-25-32,-173 25-15,74-49-1,24 49 1,26-50 0,24 25-1,-49-24 1,-125 49-16,26-25 16,73-124-1,-73 99 1,-1-24-1,50-124 1,25-1 0,-25 26-1,-74-1 1,-1 100 15,-24-26-15,-25-49-1,0-24 1,0 49 0,0-25-1,0 25 1,0 25 0,-49 0-1,-1 24 1,25 26-1,0-1 1,25 0 0,-24 25 15,-26-24-31,50 24 31,-25-25-15,0 26-1,0-1 1,25-25 0,-49 1-1,24-1 1,-25 0 0,26 26-1,-1-51 1,0 75-16,0-25 15,-24-24 1,24-1 0,25 1 15,-50-1-15,25 25-1,25 0 1,-24 1-1,-1-1 1</inkml:trace>
+  <inkml:trace contextRef="#ctx0" brushRef="#br0" timeOffset="11699.81">13047 13271 0,'-25'0'62,"25"-25"-31,49 25-15,-24 0 0,50 0-1,-1 0 1,25 0 0,-74 0-1,50 0 1,-51 0-1,51 0 1,49 0 0,0 0-1,0 0 1,-75 0-16,-24 0 16,0 0-16,25 0 15,24 0 1,-24 0 31,49 0-32,-25 0 1,1 0 0,24-50-1,0 50 1,0 0-1,-24 0 1,-50 0-16,-25-25 16,74 25-1,-24-25 1,-75 25 234,0 0-234,25 25-1,-25-25 32,-49 0-31,-1-25-1,26-74 1,-26 0 0,51 49-1,-1 26 1,0-26 78,0 50 124,0 0-186,-148 0-1,98 0-16,26 0 1,-51 0 0,76 0-1,-1 0 17,-25 0-17,25-25 1,-24 25-1,24 0 17,0 0-17,-4043-25 1,8037 25 15,-4118-49-15,50 24-1,0 25-15,49-50 16,-99 26 0,75 24-1,49 0 1,0 0 0,0-25-1,1 25 63,-1 0-46,0 25-17,0-25 32,25 24-31,-49 26-1,49 0 1,0-1 0,0-24-1,0 0 1,0 24-1,0 1 1,0 24 0,0-24-1,0-25 17,0 0-17,0-1 1,24-24 15,-24 25 125,25-25-124,25 0-1,-25 0-16</inkml:trace>
+  <inkml:trace contextRef="#ctx0" brushRef="#br0" timeOffset="16810.7">8979 9426 0,'25'0'94,"-1"0"-63,1 0-15,0 0-16,49 0 47,26 0-32,-1 0 1,50-25-1,-25-25 1,-25 50 0,-25-49-1,-24 49 1,-25 0 0,24 0 109,1 0-110,74-25 1,-25 0-1,75 25 1,-25-25 0,-100 25-16,-24 0 15,25 0 1</inkml:trace>
+  <inkml:trace contextRef="#ctx0" brushRef="#br0" timeOffset="33835.1">20736 5755 0,'0'0'0,"-49"-50"16,-26-24-1,-99-100 1,-49 0 15,-74-49-15,-249-50-1,-471-148 1,-819-150 0,968 348-16,-50 49 15,-1835-148 1,1910 322 0,148 49-1,125 26 1,173 49-1,-3994 74 1,8013 50 0,-4366 75-1,-993 322 17,1043-397-17,-1166 620 1,1140-471-1,224 99 1,198 0 0,100 74-1,74 75 1,25 50 0,49 74-1,-49 49 1,99-123-1,74 272 1,150-223 0,-26-173-1,174 49 17,223 124-17,150 75 1,296-1-1,770 299 1,99-348 0,174-348-1,-348-421 1,-273 0 0,26 0-1,-820 0 1,-48-49-1,23-348 1,-23-50 0,48-123-1,-173 123 17,-99 100-17,-74 49 1,-150-24-1,-49-25 1,75-174 0,49 74-1,25 1 1,0-224 0,-25-25-1,-174 26 1,-74-1-1,0 50 1,0 0 0,-25 99 15,-74 0-15,49 298-16,-49-50 15,-223-620 1,98 372-1,100 273 1,75 74 0,-50 50-1,24-25 1,1 75 0,24 24-1,1 1 1,24-26-1,-124-173 17,124 174-17,-49-149 1,-1-125 0,-24 100-1,50 50 1,24 74-1,0 25 1,25 49 0,0 25 93,0-24-93,0-1-1,0 25 1</inkml:trace>
+</inkml:ink>
 </file>
 
 <file path=ppt/notesMasters/notesMaster1.xml><?xml version="1.0" encoding="utf-8"?>
@@ -6712,21 +6743,21 @@
           <a:p>
             <a:pPr lvl="1"/>
             <a:r>
-              <a:rPr lang="fr-FR" sz="1800" dirty="0"/>
-              <a:t>Matlab, SAS, </a:t>
-            </a:r>
-            <a:r>
-              <a:rPr lang="fr-FR" sz="1800" dirty="0" err="1"/>
+              <a:rPr lang="fr-FR" sz="2000" dirty="0" err="1"/>
               <a:t>PyTorch</a:t>
             </a:r>
-            <a:r>
-              <a:rPr lang="fr-FR" sz="1800" dirty="0"/>
-              <a:t>, R, …</a:t>
-            </a:r>
-          </a:p>
-          <a:p>
-            <a:r>
-              <a:rPr lang="fr-FR" sz="2400" dirty="0"/>
+            <a:endParaRPr lang="fr-FR" sz="2000" dirty="0"/>
+          </a:p>
+          <a:p>
+            <a:pPr lvl="2"/>
+            <a:r>
+              <a:rPr lang="fr-FR" sz="1600" dirty="0"/>
+              <a:t>Facebook</a:t>
+            </a:r>
+          </a:p>
+          <a:p>
+            <a:r>
+              <a:rPr lang="fr-FR" dirty="0"/>
               <a:t>Prédiction</a:t>
             </a:r>
           </a:p>
@@ -7684,6 +7715,57 @@
           </a:extLst>
         </p:spPr>
       </p:pic>
+      <mc:AlternateContent xmlns:mc="http://schemas.openxmlformats.org/markup-compatibility/2006">
+        <mc:Choice xmlns:p14="http://schemas.microsoft.com/office/powerpoint/2010/main" Requires="p14">
+          <p:contentPart p14:bwMode="auto" r:id="rId3">
+            <p14:nvContentPartPr>
+              <p14:cNvPr id="3" name="Encre 2">
+                <a:extLst>
+                  <a:ext uri="{FF2B5EF4-FFF2-40B4-BE49-F238E27FC236}">
+                    <a16:creationId xmlns:a16="http://schemas.microsoft.com/office/drawing/2014/main" id="{432B6C52-2DEE-BBBD-1226-270A175F56C7}"/>
+                  </a:ext>
+                </a:extLst>
+              </p14:cNvPr>
+              <p14:cNvContentPartPr/>
+              <p14:nvPr/>
+            </p14:nvContentPartPr>
+            <p14:xfrm>
+              <a:off x="571320" y="1107360"/>
+              <a:ext cx="7126200" cy="5742000"/>
+            </p14:xfrm>
+          </p:contentPart>
+        </mc:Choice>
+        <mc:Fallback>
+          <p:pic>
+            <p:nvPicPr>
+              <p:cNvPr id="3" name="Encre 2">
+                <a:extLst>
+                  <a:ext uri="{FF2B5EF4-FFF2-40B4-BE49-F238E27FC236}">
+                    <a16:creationId xmlns:a16="http://schemas.microsoft.com/office/drawing/2014/main" id="{432B6C52-2DEE-BBBD-1226-270A175F56C7}"/>
+                  </a:ext>
+                </a:extLst>
+              </p:cNvPr>
+              <p:cNvPicPr/>
+              <p:nvPr/>
+            </p:nvPicPr>
+            <p:blipFill>
+              <a:blip r:embed="rId4"/>
+              <a:stretch>
+                <a:fillRect/>
+              </a:stretch>
+            </p:blipFill>
+            <p:spPr>
+              <a:xfrm>
+                <a:off x="561960" y="1098000"/>
+                <a:ext cx="7144920" cy="5760720"/>
+              </a:xfrm>
+              <a:prstGeom prst="rect">
+                <a:avLst/>
+              </a:prstGeom>
+            </p:spPr>
+          </p:pic>
+        </mc:Fallback>
+      </mc:AlternateContent>
     </p:spTree>
     <p:extLst>
       <p:ext uri="{BB962C8B-B14F-4D97-AF65-F5344CB8AC3E}">
@@ -9441,8 +9523,13 @@
             <a:pPr lvl="1"/>
             <a:r>
               <a:rPr lang="fr-FR" dirty="0"/>
-              <a:t>Flask</a:t>
-            </a:r>
+              <a:t>Flask, </a:t>
+            </a:r>
+            <a:r>
+              <a:rPr lang="fr-FR" dirty="0" err="1"/>
+              <a:t>FastAPI</a:t>
+            </a:r>
+            <a:endParaRPr lang="fr-FR" dirty="0"/>
           </a:p>
         </p:txBody>
       </p:sp>
